--- a/Solstice_Docs_QA_Executive_Proposal.pptx
+++ b/Solstice_Docs_QA_Executive_Proposal.pptx
@@ -9919,7 +9919,7 @@
                 </a:solidFill>
                 <a:latin typeface="Aptos"/>
               </a:rPr>
-              <a:t>Return the documentation text with article and section source.</a:t>
+              <a:t>Return docs text with Doc ID, title and section source.</a:t>
             </a:r>
           </a:p>
         </p:txBody>
@@ -12164,7 +12164,7 @@
                 </a:solidFill>
                 <a:latin typeface="Aptos"/>
               </a:rPr>
-              <a:t>Anthropic API synthesis optional; retrieval-only by default</a:t>
+              <a:t>Optional Gemini query rewrite + answer synthesis; retrieval-only by default</a:t>
             </a:r>
           </a:p>
         </p:txBody>
@@ -12330,7 +12330,7 @@
                 </a:solidFill>
                 <a:latin typeface="Aptos"/>
               </a:rPr>
-              <a:t>Keep answer selection separate from wording. An LLM may polish an answer only after retrieval passes; it is not the source of truth.</a:t>
+              <a:t>Gemini can suggest clearer wording for confirmation or polish an evidence-backed answer; retrieval remains the gate and source of truth.</a:t>
             </a:r>
           </a:p>
         </p:txBody>
@@ -13064,7 +13064,7 @@
                 </a:solidFill>
                 <a:latin typeface="Aptos"/>
               </a:rPr>
-              <a:t>Answer displays article/section; debug mode exposes confidence and missing terms.</a:t>
+              <a:t>Answer displays Doc ID, title/section; debug mode exposes confidence and missing terms.</a:t>
             </a:r>
           </a:p>
         </p:txBody>
@@ -13222,7 +13222,7 @@
                 </a:solidFill>
                 <a:latin typeface="Aptos"/>
               </a:rPr>
-              <a:t>LLM is off by default, receives retrieved passages only, requires citations and checks numbers.</a:t>
+              <a:t>Optional Gemini rewrite (user-confirmed) and cited, number-checked answer synthesis.</a:t>
             </a:r>
           </a:p>
         </p:txBody>
